--- a/lecture_pptx/out/s14/ワーク02.pptx
+++ b/lecture_pptx/out/s14/ワーク02.pptx
@@ -2279,7 +2279,7 @@
         <p:spPr>
           <a:xfrm>
             <a:off x="365760" y="1188720"/>
-            <a:ext cx="1979676" cy="2468880"/>
+            <a:ext cx="1979676" cy="3017520"/>
           </a:xfrm>
           <a:prstGeom prst="roundRect">
             <a:avLst>
@@ -2386,8 +2386,8 @@
         </p:nvSpPr>
         <p:spPr>
           <a:xfrm>
-            <a:off x="530352" y="1901952"/>
-            <a:ext cx="1650492" cy="1645920"/>
+            <a:off x="530352" y="1938528"/>
+            <a:ext cx="1650492" cy="2148840"/>
           </a:xfrm>
           <a:prstGeom prst="rect">
             <a:avLst/>
@@ -2401,12 +2401,12 @@
           <a:p>
             <a:pPr indent="0" marL="0">
               <a:spcAft>
-                <a:spcPts val="200"/>
+                <a:spcPts val="600"/>
               </a:spcAft>
               <a:buNone/>
             </a:pPr>
             <a:r>
-              <a:rPr lang="en-US" sz="1300" dirty="0">
+              <a:rPr lang="en-US" sz="1600" dirty="0">
                 <a:solidFill>
                   <a:srgbClr val="1A1A1A"/>
                 </a:solidFill>
@@ -2416,7 +2416,7 @@
               </a:rPr>
               <a:t>日付・本文・送信数・既読数・クリック数 等の記録。</a:t>
             </a:r>
-            <a:endParaRPr lang="en-US" sz="1300" dirty="0"/>
+            <a:endParaRPr lang="en-US" sz="1600" dirty="0"/>
           </a:p>
         </p:txBody>
       </p:sp>
@@ -2429,7 +2429,7 @@
         <p:spPr>
           <a:xfrm>
             <a:off x="2510028" y="1188720"/>
-            <a:ext cx="1979676" cy="2468880"/>
+            <a:ext cx="1979676" cy="3017520"/>
           </a:xfrm>
           <a:prstGeom prst="roundRect">
             <a:avLst>
@@ -2536,8 +2536,8 @@
         </p:nvSpPr>
         <p:spPr>
           <a:xfrm>
-            <a:off x="2674620" y="1901952"/>
-            <a:ext cx="1650492" cy="1645920"/>
+            <a:off x="2674620" y="1938528"/>
+            <a:ext cx="1650492" cy="2148840"/>
           </a:xfrm>
           <a:prstGeom prst="rect">
             <a:avLst/>
@@ -2551,12 +2551,12 @@
           <a:p>
             <a:pPr indent="0" marL="0">
               <a:spcAft>
-                <a:spcPts val="200"/>
+                <a:spcPts val="600"/>
               </a:spcAft>
               <a:buNone/>
             </a:pPr>
             <a:r>
-              <a:rPr lang="en-US" sz="1300" dirty="0">
+              <a:rPr lang="en-US" sz="1600" dirty="0">
                 <a:solidFill>
                   <a:srgbClr val="1A1A1A"/>
                 </a:solidFill>
@@ -2564,9 +2564,26 @@
                 <a:ea typeface="Yu Gothic UI" pitchFamily="34" charset="-122"/>
                 <a:cs typeface="Yu Gothic UI" pitchFamily="34" charset="-120"/>
               </a:rPr>
-              <a:t>Key Performance Indicator。配信なら開封率/クリック率が代表。</a:t>
-            </a:r>
-            <a:endParaRPr lang="en-US" sz="1300" dirty="0"/>
+              <a:t>Key Performance Indicator。</a:t>
+            </a:r>
+            <a:pPr indent="0" marL="0">
+              <a:spcAft>
+                <a:spcPts val="600"/>
+              </a:spcAft>
+              <a:buNone/>
+            </a:pPr>
+            <a:r>
+              <a:rPr lang="en-US" sz="1600" dirty="0">
+                <a:solidFill>
+                  <a:srgbClr val="1A1A1A"/>
+                </a:solidFill>
+                <a:latin typeface="Yu Gothic UI" pitchFamily="34" charset="0"/>
+                <a:ea typeface="Yu Gothic UI" pitchFamily="34" charset="-122"/>
+                <a:cs typeface="Yu Gothic UI" pitchFamily="34" charset="-120"/>
+              </a:rPr>
+              <a:t>配信なら開封率/クリック率が代表。</a:t>
+            </a:r>
+            <a:endParaRPr lang="en-US" sz="1600" dirty="0"/>
           </a:p>
         </p:txBody>
       </p:sp>
@@ -2579,7 +2596,7 @@
         <p:spPr>
           <a:xfrm>
             <a:off x="4654296" y="1188720"/>
-            <a:ext cx="1979676" cy="2468880"/>
+            <a:ext cx="1979676" cy="3017520"/>
           </a:xfrm>
           <a:prstGeom prst="roundRect">
             <a:avLst>
@@ -2686,8 +2703,8 @@
         </p:nvSpPr>
         <p:spPr>
           <a:xfrm>
-            <a:off x="4818888" y="1901952"/>
-            <a:ext cx="1650492" cy="1645920"/>
+            <a:off x="4818888" y="1938528"/>
+            <a:ext cx="1650492" cy="2148840"/>
           </a:xfrm>
           <a:prstGeom prst="rect">
             <a:avLst/>
@@ -2701,12 +2718,12 @@
           <a:p>
             <a:pPr indent="0" marL="0">
               <a:spcAft>
-                <a:spcPts val="200"/>
+                <a:spcPts val="600"/>
               </a:spcAft>
               <a:buNone/>
             </a:pPr>
             <a:r>
-              <a:rPr lang="en-US" sz="1300" dirty="0">
+              <a:rPr lang="en-US" sz="1600" dirty="0">
                 <a:solidFill>
                   <a:srgbClr val="1A1A1A"/>
                 </a:solidFill>
@@ -2714,9 +2731,26 @@
                 <a:ea typeface="Yu Gothic UI" pitchFamily="34" charset="-122"/>
                 <a:cs typeface="Yu Gothic UI" pitchFamily="34" charset="-120"/>
               </a:rPr>
-              <a:t>週1回出る、配信状況のまとめ。月曜に届く設定が王道。</a:t>
-            </a:r>
-            <a:endParaRPr lang="en-US" sz="1300" dirty="0"/>
+              <a:t>週1回出る、配信状況のまとめ。</a:t>
+            </a:r>
+            <a:pPr indent="0" marL="0">
+              <a:spcAft>
+                <a:spcPts val="600"/>
+              </a:spcAft>
+              <a:buNone/>
+            </a:pPr>
+            <a:r>
+              <a:rPr lang="en-US" sz="1600" dirty="0">
+                <a:solidFill>
+                  <a:srgbClr val="1A1A1A"/>
+                </a:solidFill>
+                <a:latin typeface="Yu Gothic UI" pitchFamily="34" charset="0"/>
+                <a:ea typeface="Yu Gothic UI" pitchFamily="34" charset="-122"/>
+                <a:cs typeface="Yu Gothic UI" pitchFamily="34" charset="-120"/>
+              </a:rPr>
+              <a:t>月曜に届く設定が王道。</a:t>
+            </a:r>
+            <a:endParaRPr lang="en-US" sz="1600" dirty="0"/>
           </a:p>
         </p:txBody>
       </p:sp>
@@ -2729,7 +2763,7 @@
         <p:spPr>
           <a:xfrm>
             <a:off x="6798564" y="1188720"/>
-            <a:ext cx="1979676" cy="2468880"/>
+            <a:ext cx="1979676" cy="3017520"/>
           </a:xfrm>
           <a:prstGeom prst="roundRect">
             <a:avLst>
@@ -2836,8 +2870,8 @@
         </p:nvSpPr>
         <p:spPr>
           <a:xfrm>
-            <a:off x="6963156" y="1901952"/>
-            <a:ext cx="1650492" cy="1645920"/>
+            <a:off x="6963156" y="1938528"/>
+            <a:ext cx="1650492" cy="2148840"/>
           </a:xfrm>
           <a:prstGeom prst="rect">
             <a:avLst/>
@@ -2851,12 +2885,12 @@
           <a:p>
             <a:pPr indent="0" marL="0">
               <a:spcAft>
-                <a:spcPts val="200"/>
+                <a:spcPts val="600"/>
               </a:spcAft>
               <a:buNone/>
             </a:pPr>
             <a:r>
-              <a:rPr lang="en-US" sz="1300" dirty="0">
+              <a:rPr lang="en-US" sz="1600" dirty="0">
                 <a:solidFill>
                   <a:srgbClr val="1A1A1A"/>
                 </a:solidFill>
@@ -2866,7 +2900,7 @@
               </a:rPr>
               <a:t>2案を同条件で比較し、反応の良い方を採用する手法。</a:t>
             </a:r>
-            <a:endParaRPr lang="en-US" sz="1300" dirty="0"/>
+            <a:endParaRPr lang="en-US" sz="1600" dirty="0"/>
           </a:p>
         </p:txBody>
       </p:sp>
@@ -2878,8 +2912,8 @@
         </p:nvSpPr>
         <p:spPr>
           <a:xfrm>
-            <a:off x="365760" y="3931920"/>
-            <a:ext cx="8412480" cy="1188720"/>
+            <a:off x="365760" y="4389120"/>
+            <a:ext cx="8412480" cy="914400"/>
           </a:xfrm>
           <a:prstGeom prst="rect">
             <a:avLst/>
